--- a/assets/powerpoints/module-n2-classe/B1-la-consigne-et-je-n-ai-pas-compris.pptx
+++ b/assets/powerpoints/module-n2-classe/B1-la-consigne-et-je-n-ai-pas-compris.pptx
@@ -11797,7 +11797,25 @@
                 </a:solidFill>
                 <a:latin typeface="Verdana"/>
               </a:rPr>
-              <a:t>On dit « &lt;b&gt;Ouvrez&lt;/b&gt; votre cahier », pas « vous ouvrez votre cahier ». Avec « vous », ce n'est plus une consigne : c'est une phrase qui raconte une habitude. Le verbe seul, en tête de phrase, veut dire « faites-le maintenant ».</a:t>
+              <a:t>On dit « </a:t>
+            </a:r>
+            <a:r>
+              <a:rPr sz="2000" b="1" i="0">
+                <a:solidFill>
+                  <a:srgbClr val="4B4F52"/>
+                </a:solidFill>
+                <a:latin typeface="Verdana"/>
+              </a:rPr>
+              <a:t>Ouvrez</a:t>
+            </a:r>
+            <a:r>
+              <a:rPr sz="2000" b="0" i="0">
+                <a:solidFill>
+                  <a:srgbClr val="4B4F52"/>
+                </a:solidFill>
+                <a:latin typeface="Verdana"/>
+              </a:rPr>
+              <a:t> votre cahier », pas « vous ouvrez votre cahier ». Avec « vous », ce n'est plus une consigne : c'est une phrase qui raconte une habitude. Le verbe seul, en tête de phrase, veut dire « faites-le maintenant ».</a:t>
             </a:r>
           </a:p>
         </p:txBody>
@@ -12144,7 +12162,43 @@
                 </a:solidFill>
                 <a:latin typeface="Verdana"/>
               </a:rPr>
-              <a:t>Trois autres, aussi utiles : « &lt;b&gt;Plus lentement&lt;/b&gt;, s'il vous plaît. » « &lt;b&gt;Qu'est-ce que ça veut dire&lt;/b&gt;, effacez ? » Et pour vérifier : « Alors, j'ouvre à la page douze ? »</a:t>
+              <a:t>Trois autres, aussi utiles : « </a:t>
+            </a:r>
+            <a:r>
+              <a:rPr sz="2000" b="1" i="0">
+                <a:solidFill>
+                  <a:srgbClr val="4B4F52"/>
+                </a:solidFill>
+                <a:latin typeface="Verdana"/>
+              </a:rPr>
+              <a:t>Plus lentement</a:t>
+            </a:r>
+            <a:r>
+              <a:rPr sz="2000" b="0" i="0">
+                <a:solidFill>
+                  <a:srgbClr val="4B4F52"/>
+                </a:solidFill>
+                <a:latin typeface="Verdana"/>
+              </a:rPr>
+              <a:t>, s'il vous plaît. » « </a:t>
+            </a:r>
+            <a:r>
+              <a:rPr sz="2000" b="1" i="0">
+                <a:solidFill>
+                  <a:srgbClr val="4B4F52"/>
+                </a:solidFill>
+                <a:latin typeface="Verdana"/>
+              </a:rPr>
+              <a:t>Qu'est-ce que ça veut dire</a:t>
+            </a:r>
+            <a:r>
+              <a:rPr sz="2000" b="0" i="0">
+                <a:solidFill>
+                  <a:srgbClr val="4B4F52"/>
+                </a:solidFill>
+                <a:latin typeface="Verdana"/>
+              </a:rPr>
+              <a:t>, effacez ? » Et pour vérifier : « Alors, j'ouvre à la page douze ? »</a:t>
             </a:r>
           </a:p>
         </p:txBody>
